--- a/docs/presentation/healthcare-case-study/federated-healthcare-use-case/dagents-federated-healthcare-use-case.pptx
+++ b/docs/presentation/healthcare-case-study/federated-healthcare-use-case/dagents-federated-healthcare-use-case.pptx
@@ -2373,7 +2373,7 @@
           </a:p>
           <a:p>
             <a:r>
-              <a:t>- /Users/pradyundevarakonda/Developer/Dagents/agents/lma/README.md</a:t>
+              <a:t>- /Users/pradyundevarakonda/Developer/Dagents/dagents/lma/README.md</a:t>
             </a:r>
           </a:p>
           <a:p>
@@ -2478,7 +2478,7 @@
           </a:p>
           <a:p>
             <a:r>
-              <a:t>- /Users/pradyundevarakonda/Developer/Dagents/agents/gma/README.md</a:t>
+              <a:t>- /Users/pradyundevarakonda/Developer/Dagents/dagents/gma/README.md</a:t>
             </a:r>
           </a:p>
           <a:p>
